--- a/lecons/LSA/Hydrology/10_LSA_HYDRO_L31_The_Soil_Moisture_Budget.pptx
+++ b/lecons/LSA/Hydrology/10_LSA_HYDRO_L31_The_Soil_Moisture_Budget.pptx
@@ -13510,7 +13510,7 @@
               <a:buNone/>
             </a:pPr>
             <a:r>
-              <a:rPr lang="en-US" sz="4000" b="1" dirty="0">
+              <a:rPr lang="en-US" sz="3200" b="1" dirty="0">
                 <a:solidFill>
                   <a:srgbClr val="111111"/>
                 </a:solidFill>
@@ -13520,7 +13520,7 @@
               </a:rPr>
               <a:t>Topic: The Drainage Basin Hydrological Cycle</a:t>
             </a:r>
-            <a:endParaRPr lang="en-US" sz="4000" dirty="0"/>
+            <a:endParaRPr lang="en-US" sz="3200" dirty="0"/>
           </a:p>
           <a:p>
             <a:pPr algn="l" indent="0" marL="0">
@@ -13530,7 +13530,7 @@
               <a:buNone/>
             </a:pPr>
             <a:r>
-              <a:rPr lang="en-US" sz="4000" b="1" dirty="0">
+              <a:rPr lang="en-US" sz="3200" b="1" dirty="0">
                 <a:solidFill>
                   <a:srgbClr val="111111"/>
                 </a:solidFill>
@@ -13540,7 +13540,7 @@
               </a:rPr>
               <a:t>Sub-topic: Components of the Drainage Basin Hydrological Cycle</a:t>
             </a:r>
-            <a:endParaRPr lang="en-US" sz="4000" dirty="0"/>
+            <a:endParaRPr lang="en-US" sz="3200" dirty="0"/>
           </a:p>
           <a:p>
             <a:pPr algn="l" indent="0" marL="0">
@@ -13550,7 +13550,7 @@
               <a:buNone/>
             </a:pPr>
             <a:r>
-              <a:rPr lang="en-US" sz="4000" b="1" dirty="0">
+              <a:rPr lang="en-US" sz="3200" b="1" dirty="0">
                 <a:solidFill>
                   <a:srgbClr val="990011"/>
                 </a:solidFill>
@@ -13560,7 +13560,7 @@
               </a:rPr>
               <a:t>Lesson 31: The Soil Moisture Budget</a:t>
             </a:r>
-            <a:endParaRPr lang="en-US" sz="4000" dirty="0"/>
+            <a:endParaRPr lang="en-US" sz="3200" dirty="0"/>
           </a:p>
         </p:txBody>
       </p:sp>
